--- a/spec/InformationStructure/diagrams/InformationStructure.pptx
+++ b/spec/InformationStructure/diagrams/InformationStructure.pptx
@@ -5,10 +5,11 @@
     <p:sldMasterId id="2147483780" r:id="rId1"/>
   </p:sldMasterIdLst>
   <p:notesMasterIdLst>
-    <p:notesMasterId r:id="rId3"/>
+    <p:notesMasterId r:id="rId4"/>
   </p:notesMasterIdLst>
   <p:sldIdLst>
     <p:sldId id="328" r:id="rId2"/>
+    <p:sldId id="329" r:id="rId3"/>
   </p:sldIdLst>
   <p:sldSz cx="35999738" cy="18000663"/>
   <p:notesSz cx="6858000" cy="9144000"/>
@@ -197,7 +198,7 @@
           <a:p>
             <a:fld id="{37CCF725-7468-4D3D-9E24-A16745BBBA77}" type="datetimeFigureOut">
               <a:rPr lang="de-DE" smtClean="0"/>
-              <a:t>28.08.2025</a:t>
+              <a:t>04.09.2025</a:t>
             </a:fld>
             <a:endParaRPr lang="de-DE"/>
           </a:p>
@@ -684,7 +685,7 @@
           <a:p>
             <a:fld id="{9A2764DB-E7DF-4EA7-A1AF-05A77C280FCA}" type="datetimeFigureOut">
               <a:rPr lang="de-DE" smtClean="0"/>
-              <a:t>28.08.2025</a:t>
+              <a:t>04.09.2025</a:t>
             </a:fld>
             <a:endParaRPr lang="de-DE"/>
           </a:p>
@@ -854,7 +855,7 @@
           <a:p>
             <a:fld id="{9A2764DB-E7DF-4EA7-A1AF-05A77C280FCA}" type="datetimeFigureOut">
               <a:rPr lang="de-DE" smtClean="0"/>
-              <a:t>28.08.2025</a:t>
+              <a:t>04.09.2025</a:t>
             </a:fld>
             <a:endParaRPr lang="de-DE"/>
           </a:p>
@@ -1034,7 +1035,7 @@
           <a:p>
             <a:fld id="{9A2764DB-E7DF-4EA7-A1AF-05A77C280FCA}" type="datetimeFigureOut">
               <a:rPr lang="de-DE" smtClean="0"/>
-              <a:t>28.08.2025</a:t>
+              <a:t>04.09.2025</a:t>
             </a:fld>
             <a:endParaRPr lang="de-DE"/>
           </a:p>
@@ -1204,7 +1205,7 @@
           <a:p>
             <a:fld id="{9A2764DB-E7DF-4EA7-A1AF-05A77C280FCA}" type="datetimeFigureOut">
               <a:rPr lang="de-DE" smtClean="0"/>
-              <a:t>28.08.2025</a:t>
+              <a:t>04.09.2025</a:t>
             </a:fld>
             <a:endParaRPr lang="de-DE"/>
           </a:p>
@@ -1450,7 +1451,7 @@
           <a:p>
             <a:fld id="{9A2764DB-E7DF-4EA7-A1AF-05A77C280FCA}" type="datetimeFigureOut">
               <a:rPr lang="de-DE" smtClean="0"/>
-              <a:t>28.08.2025</a:t>
+              <a:t>04.09.2025</a:t>
             </a:fld>
             <a:endParaRPr lang="de-DE"/>
           </a:p>
@@ -1682,7 +1683,7 @@
           <a:p>
             <a:fld id="{9A2764DB-E7DF-4EA7-A1AF-05A77C280FCA}" type="datetimeFigureOut">
               <a:rPr lang="de-DE" smtClean="0"/>
-              <a:t>28.08.2025</a:t>
+              <a:t>04.09.2025</a:t>
             </a:fld>
             <a:endParaRPr lang="de-DE"/>
           </a:p>
@@ -2049,7 +2050,7 @@
           <a:p>
             <a:fld id="{9A2764DB-E7DF-4EA7-A1AF-05A77C280FCA}" type="datetimeFigureOut">
               <a:rPr lang="de-DE" smtClean="0"/>
-              <a:t>28.08.2025</a:t>
+              <a:t>04.09.2025</a:t>
             </a:fld>
             <a:endParaRPr lang="de-DE"/>
           </a:p>
@@ -2167,7 +2168,7 @@
           <a:p>
             <a:fld id="{9A2764DB-E7DF-4EA7-A1AF-05A77C280FCA}" type="datetimeFigureOut">
               <a:rPr lang="de-DE" smtClean="0"/>
-              <a:t>28.08.2025</a:t>
+              <a:t>04.09.2025</a:t>
             </a:fld>
             <a:endParaRPr lang="de-DE"/>
           </a:p>
@@ -2262,7 +2263,7 @@
           <a:p>
             <a:fld id="{9A2764DB-E7DF-4EA7-A1AF-05A77C280FCA}" type="datetimeFigureOut">
               <a:rPr lang="de-DE" smtClean="0"/>
-              <a:t>28.08.2025</a:t>
+              <a:t>04.09.2025</a:t>
             </a:fld>
             <a:endParaRPr lang="de-DE"/>
           </a:p>
@@ -2539,7 +2540,7 @@
           <a:p>
             <a:fld id="{9A2764DB-E7DF-4EA7-A1AF-05A77C280FCA}" type="datetimeFigureOut">
               <a:rPr lang="de-DE" smtClean="0"/>
-              <a:t>28.08.2025</a:t>
+              <a:t>04.09.2025</a:t>
             </a:fld>
             <a:endParaRPr lang="de-DE"/>
           </a:p>
@@ -2796,7 +2797,7 @@
           <a:p>
             <a:fld id="{9A2764DB-E7DF-4EA7-A1AF-05A77C280FCA}" type="datetimeFigureOut">
               <a:rPr lang="de-DE" smtClean="0"/>
-              <a:t>28.08.2025</a:t>
+              <a:t>04.09.2025</a:t>
             </a:fld>
             <a:endParaRPr lang="de-DE"/>
           </a:p>
@@ -3075,7 +3076,7 @@
           <a:p>
             <a:fld id="{9A2764DB-E7DF-4EA7-A1AF-05A77C280FCA}" type="datetimeFigureOut">
               <a:rPr lang="de-DE" smtClean="0"/>
-              <a:t>28.08.2025</a:t>
+              <a:t>04.09.2025</a:t>
             </a:fld>
             <a:endParaRPr lang="de-DE"/>
           </a:p>
@@ -15470,8 +15471,8 @@
         </p:nvSpPr>
         <p:spPr>
           <a:xfrm>
-            <a:off x="28132118" y="10824293"/>
-            <a:ext cx="1815783" cy="445572"/>
+            <a:off x="28132118" y="10680700"/>
+            <a:ext cx="1815783" cy="589165"/>
           </a:xfrm>
           <a:prstGeom prst="rect">
             <a:avLst/>
@@ -15577,6 +15578,27 @@
               </a:solidFill>
               <a:latin typeface="Calibri" panose="020F0502020204030204"/>
             </a:endParaRPr>
+          </a:p>
+          <a:p>
+            <a:pPr defTabSz="914411"/>
+            <a:r>
+              <a:rPr lang="en-US" sz="800" kern="0" dirty="0" err="1">
+                <a:solidFill>
+                  <a:prstClr val="black"/>
+                </a:solidFill>
+                <a:latin typeface="Calibri" panose="020F0502020204030204"/>
+              </a:rPr>
+              <a:t>httpMethods</a:t>
+            </a:r>
+            <a:r>
+              <a:rPr lang="en-US" sz="800" kern="0" dirty="0">
+                <a:solidFill>
+                  <a:prstClr val="black"/>
+                </a:solidFill>
+                <a:latin typeface="Calibri" panose="020F0502020204030204"/>
+              </a:rPr>
+              <a:t>[*]</a:t>
+            </a:r>
           </a:p>
           <a:p>
             <a:pPr defTabSz="914411"/>
@@ -15642,8 +15664,8 @@
         </p:nvCxnSpPr>
         <p:spPr>
           <a:xfrm flipH="1" flipV="1">
-            <a:off x="29947901" y="11047079"/>
-            <a:ext cx="435676" cy="1"/>
+            <a:off x="29947901" y="10975283"/>
+            <a:ext cx="435676" cy="71797"/>
           </a:xfrm>
           <a:prstGeom prst="straightConnector1">
             <a:avLst/>
@@ -15988,8 +16010,8 @@
         </p:nvSpPr>
         <p:spPr>
           <a:xfrm>
-            <a:off x="17474750" y="12791816"/>
-            <a:ext cx="1815783" cy="445572"/>
+            <a:off x="17474750" y="12791815"/>
+            <a:ext cx="1815783" cy="551869"/>
           </a:xfrm>
           <a:prstGeom prst="rect">
             <a:avLst/>
@@ -16099,15 +16121,25 @@
             </a:endParaRPr>
           </a:p>
           <a:p>
-            <a:pPr defTabSz="914411">
-              <a:defRPr/>
-            </a:pPr>
-            <a:endParaRPr lang="en-US" sz="800" kern="0" dirty="0">
-              <a:solidFill>
-                <a:prstClr val="black"/>
-              </a:solidFill>
-              <a:latin typeface="Calibri" panose="020F0502020204030204"/>
-            </a:endParaRPr>
+            <a:pPr defTabSz="914411"/>
+            <a:r>
+              <a:rPr lang="en-US" sz="800" kern="0" dirty="0" err="1">
+                <a:solidFill>
+                  <a:prstClr val="black"/>
+                </a:solidFill>
+                <a:latin typeface="Calibri" panose="020F0502020204030204"/>
+              </a:rPr>
+              <a:t>httpMethods</a:t>
+            </a:r>
+            <a:r>
+              <a:rPr lang="en-US" sz="800" kern="0" dirty="0">
+                <a:solidFill>
+                  <a:prstClr val="black"/>
+                </a:solidFill>
+                <a:latin typeface="Calibri" panose="020F0502020204030204"/>
+              </a:rPr>
+              <a:t>[*]</a:t>
+            </a:r>
           </a:p>
         </p:txBody>
       </p:sp>
@@ -16128,9 +16160,9 @@
           <p:nvPr/>
         </p:nvCxnSpPr>
         <p:spPr>
-          <a:xfrm flipH="1" flipV="1">
-            <a:off x="19290533" y="13014602"/>
-            <a:ext cx="435676" cy="1"/>
+          <a:xfrm flipH="1">
+            <a:off x="19290533" y="13014603"/>
+            <a:ext cx="435676" cy="53147"/>
           </a:xfrm>
           <a:prstGeom prst="straightConnector1">
             <a:avLst/>
@@ -17188,6 +17220,1057 @@
 </p:sld>
 </file>
 
+<file path=ppt/slides/slide2.xml><?xml version="1.0" encoding="utf-8"?>
+<p:sld xmlns:a="http://schemas.openxmlformats.org/drawingml/2006/main" xmlns:r="http://schemas.openxmlformats.org/officeDocument/2006/relationships" xmlns:p="http://schemas.openxmlformats.org/presentationml/2006/main">
+  <p:cSld>
+    <p:spTree>
+      <p:nvGrpSpPr>
+        <p:cNvPr id="1" name=""/>
+        <p:cNvGrpSpPr/>
+        <p:nvPr/>
+      </p:nvGrpSpPr>
+      <p:grpSpPr>
+        <a:xfrm>
+          <a:off x="0" y="0"/>
+          <a:ext cx="0" cy="0"/>
+          <a:chOff x="0" y="0"/>
+          <a:chExt cx="0" cy="0"/>
+        </a:xfrm>
+      </p:grpSpPr>
+      <p:graphicFrame>
+        <p:nvGraphicFramePr>
+          <p:cNvPr id="21" name="think-cell data - do not delete" hidden="1">
+            <a:extLst>
+              <a:ext uri="{FF2B5EF4-FFF2-40B4-BE49-F238E27FC236}">
+                <a16:creationId xmlns:a16="http://schemas.microsoft.com/office/drawing/2014/main" id="{6840CA79-65CB-9D01-7B4D-3958741687A1}"/>
+              </a:ext>
+            </a:extLst>
+          </p:cNvPr>
+          <p:cNvGraphicFramePr>
+            <a:graphicFrameLocks noChangeAspect="1"/>
+          </p:cNvGraphicFramePr>
+          <p:nvPr>
+            <p:custDataLst>
+              <p:tags r:id="rId1"/>
+            </p:custDataLst>
+            <p:extLst>
+              <p:ext uri="{D42A27DB-BD31-4B8C-83A1-F6EECF244321}">
+                <p14:modId xmlns:p14="http://schemas.microsoft.com/office/powerpoint/2010/main" val="2830477445"/>
+              </p:ext>
+            </p:extLst>
+          </p:nvPr>
+        </p:nvGraphicFramePr>
+        <p:xfrm>
+          <a:off x="1588" y="1588"/>
+          <a:ext cx="1588" cy="1588"/>
+        </p:xfrm>
+        <a:graphic>
+          <a:graphicData uri="http://schemas.openxmlformats.org/presentationml/2006/ole">
+            <mc:AlternateContent xmlns:mc="http://schemas.openxmlformats.org/markup-compatibility/2006">
+              <mc:Choice xmlns:v="urn:schemas-microsoft-com:vml" Requires="v">
+                <p:oleObj name="think-cell Folie" r:id="rId3" imgW="523" imgH="514" progId="TCLayout.ActiveDocument.1">
+                  <p:embed/>
+                </p:oleObj>
+              </mc:Choice>
+              <mc:Fallback>
+                <p:oleObj name="think-cell Folie" r:id="rId3" imgW="523" imgH="514" progId="TCLayout.ActiveDocument.1">
+                  <p:embed/>
+                  <p:pic>
+                    <p:nvPicPr>
+                      <p:cNvPr id="0" name=""/>
+                      <p:cNvPicPr/>
+                      <p:nvPr/>
+                    </p:nvPicPr>
+                    <p:blipFill>
+                      <a:blip r:embed="rId4"/>
+                      <a:stretch>
+                        <a:fillRect/>
+                      </a:stretch>
+                    </p:blipFill>
+                    <p:spPr>
+                      <a:xfrm>
+                        <a:off x="1588" y="1588"/>
+                        <a:ext cx="1588" cy="1588"/>
+                      </a:xfrm>
+                      <a:prstGeom prst="rect">
+                        <a:avLst/>
+                      </a:prstGeom>
+                    </p:spPr>
+                  </p:pic>
+                </p:oleObj>
+              </mc:Fallback>
+            </mc:AlternateContent>
+          </a:graphicData>
+        </a:graphic>
+      </p:graphicFrame>
+      <p:sp>
+        <p:nvSpPr>
+          <p:cNvPr id="2" name="Rechteck 1">
+            <a:extLst>
+              <a:ext uri="{FF2B5EF4-FFF2-40B4-BE49-F238E27FC236}">
+                <a16:creationId xmlns:a16="http://schemas.microsoft.com/office/drawing/2014/main" id="{4BE06AA4-B4C4-B3BB-58AE-2706ADC06FFA}"/>
+              </a:ext>
+            </a:extLst>
+          </p:cNvPr>
+          <p:cNvSpPr/>
+          <p:nvPr/>
+        </p:nvSpPr>
+        <p:spPr>
+          <a:xfrm>
+            <a:off x="2182360" y="13106400"/>
+            <a:ext cx="2432505" cy="752475"/>
+          </a:xfrm>
+          <a:prstGeom prst="rect">
+            <a:avLst/>
+          </a:prstGeom>
+        </p:spPr>
+        <p:style>
+          <a:lnRef idx="2">
+            <a:schemeClr val="accent2">
+              <a:shade val="15000"/>
+            </a:schemeClr>
+          </a:lnRef>
+          <a:fillRef idx="1">
+            <a:schemeClr val="accent2"/>
+          </a:fillRef>
+          <a:effectRef idx="0">
+            <a:schemeClr val="accent2"/>
+          </a:effectRef>
+          <a:fontRef idx="minor">
+            <a:schemeClr val="lt1"/>
+          </a:fontRef>
+        </p:style>
+        <p:txBody>
+          <a:bodyPr rtlCol="0" anchor="ctr"/>
+          <a:lstStyle/>
+          <a:p>
+            <a:pPr algn="ctr"/>
+            <a:r>
+              <a:rPr lang="de-DE" sz="2000" b="1" dirty="0" err="1"/>
+              <a:t>Applications</a:t>
+            </a:r>
+            <a:r>
+              <a:rPr lang="de-DE" sz="2000" b="1" dirty="0"/>
+              <a:t> </a:t>
+            </a:r>
+            <a:r>
+              <a:rPr lang="de-DE" sz="2000" b="1" dirty="0" err="1"/>
+              <a:t>with</a:t>
+            </a:r>
+            <a:r>
+              <a:rPr lang="de-DE" sz="2000" b="1" dirty="0"/>
+              <a:t> </a:t>
+            </a:r>
+            <a:br>
+              <a:rPr lang="de-DE" sz="2000" b="1" dirty="0"/>
+            </a:br>
+            <a:r>
+              <a:rPr lang="de-DE" sz="2000" b="1" dirty="0" err="1"/>
+              <a:t>OaM</a:t>
+            </a:r>
+            <a:r>
+              <a:rPr lang="de-DE" sz="2000" b="1" dirty="0"/>
+              <a:t> Interface</a:t>
+            </a:r>
+          </a:p>
+        </p:txBody>
+      </p:sp>
+      <p:sp>
+        <p:nvSpPr>
+          <p:cNvPr id="3" name="Rechteck 2">
+            <a:extLst>
+              <a:ext uri="{FF2B5EF4-FFF2-40B4-BE49-F238E27FC236}">
+                <a16:creationId xmlns:a16="http://schemas.microsoft.com/office/drawing/2014/main" id="{BBA0CA5B-A50E-AA52-88B9-A7F362872913}"/>
+              </a:ext>
+            </a:extLst>
+          </p:cNvPr>
+          <p:cNvSpPr/>
+          <p:nvPr/>
+        </p:nvSpPr>
+        <p:spPr>
+          <a:xfrm>
+            <a:off x="1287011" y="12401550"/>
+            <a:ext cx="547688" cy="2162175"/>
+          </a:xfrm>
+          <a:prstGeom prst="rect">
+            <a:avLst/>
+          </a:prstGeom>
+          <a:ln>
+            <a:noFill/>
+          </a:ln>
+        </p:spPr>
+        <p:style>
+          <a:lnRef idx="2">
+            <a:schemeClr val="accent1">
+              <a:shade val="15000"/>
+            </a:schemeClr>
+          </a:lnRef>
+          <a:fillRef idx="1">
+            <a:schemeClr val="accent1"/>
+          </a:fillRef>
+          <a:effectRef idx="0">
+            <a:schemeClr val="accent1"/>
+          </a:effectRef>
+          <a:fontRef idx="minor">
+            <a:schemeClr val="lt1"/>
+          </a:fontRef>
+        </p:style>
+        <p:txBody>
+          <a:bodyPr rtlCol="0" anchor="ctr"/>
+          <a:lstStyle/>
+          <a:p>
+            <a:pPr algn="ctr"/>
+            <a:endParaRPr lang="de-DE" sz="2000" b="1"/>
+          </a:p>
+        </p:txBody>
+      </p:sp>
+      <p:sp>
+        <p:nvSpPr>
+          <p:cNvPr id="4" name="Rechteck 3">
+            <a:extLst>
+              <a:ext uri="{FF2B5EF4-FFF2-40B4-BE49-F238E27FC236}">
+                <a16:creationId xmlns:a16="http://schemas.microsoft.com/office/drawing/2014/main" id="{8FB9CAEF-6291-6CC4-E3F6-21B875A502BF}"/>
+              </a:ext>
+            </a:extLst>
+          </p:cNvPr>
+          <p:cNvSpPr/>
+          <p:nvPr/>
+        </p:nvSpPr>
+        <p:spPr>
+          <a:xfrm>
+            <a:off x="4962526" y="12401550"/>
+            <a:ext cx="547688" cy="2162175"/>
+          </a:xfrm>
+          <a:prstGeom prst="rect">
+            <a:avLst/>
+          </a:prstGeom>
+          <a:ln>
+            <a:noFill/>
+          </a:ln>
+        </p:spPr>
+        <p:style>
+          <a:lnRef idx="2">
+            <a:schemeClr val="accent1">
+              <a:shade val="15000"/>
+            </a:schemeClr>
+          </a:lnRef>
+          <a:fillRef idx="1">
+            <a:schemeClr val="accent1"/>
+          </a:fillRef>
+          <a:effectRef idx="0">
+            <a:schemeClr val="accent1"/>
+          </a:effectRef>
+          <a:fontRef idx="minor">
+            <a:schemeClr val="lt1"/>
+          </a:fontRef>
+        </p:style>
+        <p:txBody>
+          <a:bodyPr rtlCol="0" anchor="ctr"/>
+          <a:lstStyle/>
+          <a:p>
+            <a:pPr algn="ctr"/>
+            <a:endParaRPr lang="de-DE" sz="2000" b="1"/>
+          </a:p>
+        </p:txBody>
+      </p:sp>
+      <p:sp>
+        <p:nvSpPr>
+          <p:cNvPr id="5" name="Rechteck 4">
+            <a:extLst>
+              <a:ext uri="{FF2B5EF4-FFF2-40B4-BE49-F238E27FC236}">
+                <a16:creationId xmlns:a16="http://schemas.microsoft.com/office/drawing/2014/main" id="{DF507D62-BA97-2B51-74C3-29F4567E42C6}"/>
+              </a:ext>
+            </a:extLst>
+          </p:cNvPr>
+          <p:cNvSpPr/>
+          <p:nvPr/>
+        </p:nvSpPr>
+        <p:spPr>
+          <a:xfrm>
+            <a:off x="1287012" y="12401550"/>
+            <a:ext cx="4223202" cy="376237"/>
+          </a:xfrm>
+          <a:prstGeom prst="rect">
+            <a:avLst/>
+          </a:prstGeom>
+          <a:ln>
+            <a:noFill/>
+          </a:ln>
+        </p:spPr>
+        <p:style>
+          <a:lnRef idx="2">
+            <a:schemeClr val="accent1">
+              <a:shade val="15000"/>
+            </a:schemeClr>
+          </a:lnRef>
+          <a:fillRef idx="1">
+            <a:schemeClr val="accent1"/>
+          </a:fillRef>
+          <a:effectRef idx="0">
+            <a:schemeClr val="accent1"/>
+          </a:effectRef>
+          <a:fontRef idx="minor">
+            <a:schemeClr val="lt1"/>
+          </a:fontRef>
+        </p:style>
+        <p:txBody>
+          <a:bodyPr rtlCol="0" anchor="ctr"/>
+          <a:lstStyle/>
+          <a:p>
+            <a:pPr algn="ctr"/>
+            <a:r>
+              <a:rPr lang="de-DE" sz="2000" b="1" dirty="0"/>
+              <a:t>p1MeasureApplication</a:t>
+            </a:r>
+          </a:p>
+        </p:txBody>
+      </p:sp>
+      <p:sp>
+        <p:nvSpPr>
+          <p:cNvPr id="6" name="Rechteck 5">
+            <a:extLst>
+              <a:ext uri="{FF2B5EF4-FFF2-40B4-BE49-F238E27FC236}">
+                <a16:creationId xmlns:a16="http://schemas.microsoft.com/office/drawing/2014/main" id="{E3A9360A-DE27-D80D-AFA8-1B21E3EBDA5C}"/>
+              </a:ext>
+            </a:extLst>
+          </p:cNvPr>
+          <p:cNvSpPr/>
+          <p:nvPr/>
+        </p:nvSpPr>
+        <p:spPr>
+          <a:xfrm>
+            <a:off x="6753224" y="13106400"/>
+            <a:ext cx="2432505" cy="752475"/>
+          </a:xfrm>
+          <a:prstGeom prst="rect">
+            <a:avLst/>
+          </a:prstGeom>
+        </p:spPr>
+        <p:style>
+          <a:lnRef idx="2">
+            <a:schemeClr val="accent2">
+              <a:shade val="15000"/>
+            </a:schemeClr>
+          </a:lnRef>
+          <a:fillRef idx="1">
+            <a:schemeClr val="accent2"/>
+          </a:fillRef>
+          <a:effectRef idx="0">
+            <a:schemeClr val="accent2"/>
+          </a:effectRef>
+          <a:fontRef idx="minor">
+            <a:schemeClr val="lt1"/>
+          </a:fontRef>
+        </p:style>
+        <p:txBody>
+          <a:bodyPr rtlCol="0" anchor="ctr"/>
+          <a:lstStyle/>
+          <a:p>
+            <a:pPr algn="ctr"/>
+            <a:r>
+              <a:rPr lang="de-DE" sz="2000" b="1" dirty="0" err="1"/>
+              <a:t>Nginx</a:t>
+            </a:r>
+            <a:endParaRPr lang="de-DE" sz="2000" b="1" dirty="0"/>
+          </a:p>
+        </p:txBody>
+      </p:sp>
+      <p:sp>
+        <p:nvSpPr>
+          <p:cNvPr id="7" name="Rechteck 6">
+            <a:extLst>
+              <a:ext uri="{FF2B5EF4-FFF2-40B4-BE49-F238E27FC236}">
+                <a16:creationId xmlns:a16="http://schemas.microsoft.com/office/drawing/2014/main" id="{435B1EB7-0CB8-B759-C136-7039219F7227}"/>
+              </a:ext>
+            </a:extLst>
+          </p:cNvPr>
+          <p:cNvSpPr/>
+          <p:nvPr/>
+        </p:nvSpPr>
+        <p:spPr>
+          <a:xfrm>
+            <a:off x="5857875" y="12401550"/>
+            <a:ext cx="547688" cy="2162175"/>
+          </a:xfrm>
+          <a:prstGeom prst="rect">
+            <a:avLst/>
+          </a:prstGeom>
+          <a:ln>
+            <a:noFill/>
+          </a:ln>
+        </p:spPr>
+        <p:style>
+          <a:lnRef idx="2">
+            <a:schemeClr val="accent1">
+              <a:shade val="15000"/>
+            </a:schemeClr>
+          </a:lnRef>
+          <a:fillRef idx="1">
+            <a:schemeClr val="accent1"/>
+          </a:fillRef>
+          <a:effectRef idx="0">
+            <a:schemeClr val="accent1"/>
+          </a:effectRef>
+          <a:fontRef idx="minor">
+            <a:schemeClr val="lt1"/>
+          </a:fontRef>
+        </p:style>
+        <p:txBody>
+          <a:bodyPr rtlCol="0" anchor="ctr"/>
+          <a:lstStyle/>
+          <a:p>
+            <a:pPr algn="ctr"/>
+            <a:endParaRPr lang="de-DE" sz="2000" b="1"/>
+          </a:p>
+        </p:txBody>
+      </p:sp>
+      <p:sp>
+        <p:nvSpPr>
+          <p:cNvPr id="8" name="Rechteck 7">
+            <a:extLst>
+              <a:ext uri="{FF2B5EF4-FFF2-40B4-BE49-F238E27FC236}">
+                <a16:creationId xmlns:a16="http://schemas.microsoft.com/office/drawing/2014/main" id="{38AC381C-C380-9076-EA24-30FA840767C5}"/>
+              </a:ext>
+            </a:extLst>
+          </p:cNvPr>
+          <p:cNvSpPr/>
+          <p:nvPr/>
+        </p:nvSpPr>
+        <p:spPr>
+          <a:xfrm>
+            <a:off x="9533390" y="12401550"/>
+            <a:ext cx="547688" cy="2162175"/>
+          </a:xfrm>
+          <a:prstGeom prst="rect">
+            <a:avLst/>
+          </a:prstGeom>
+          <a:ln>
+            <a:noFill/>
+          </a:ln>
+        </p:spPr>
+        <p:style>
+          <a:lnRef idx="2">
+            <a:schemeClr val="accent1">
+              <a:shade val="15000"/>
+            </a:schemeClr>
+          </a:lnRef>
+          <a:fillRef idx="1">
+            <a:schemeClr val="accent1"/>
+          </a:fillRef>
+          <a:effectRef idx="0">
+            <a:schemeClr val="accent1"/>
+          </a:effectRef>
+          <a:fontRef idx="minor">
+            <a:schemeClr val="lt1"/>
+          </a:fontRef>
+        </p:style>
+        <p:txBody>
+          <a:bodyPr rtlCol="0" anchor="ctr"/>
+          <a:lstStyle/>
+          <a:p>
+            <a:pPr algn="ctr"/>
+            <a:endParaRPr lang="de-DE" sz="2000" b="1"/>
+          </a:p>
+        </p:txBody>
+      </p:sp>
+      <p:sp>
+        <p:nvSpPr>
+          <p:cNvPr id="9" name="Rechteck 8">
+            <a:extLst>
+              <a:ext uri="{FF2B5EF4-FFF2-40B4-BE49-F238E27FC236}">
+                <a16:creationId xmlns:a16="http://schemas.microsoft.com/office/drawing/2014/main" id="{31500D96-073B-F5E7-5D29-8214B2825A66}"/>
+              </a:ext>
+            </a:extLst>
+          </p:cNvPr>
+          <p:cNvSpPr/>
+          <p:nvPr/>
+        </p:nvSpPr>
+        <p:spPr>
+          <a:xfrm>
+            <a:off x="5857876" y="12401550"/>
+            <a:ext cx="4223202" cy="376237"/>
+          </a:xfrm>
+          <a:prstGeom prst="rect">
+            <a:avLst/>
+          </a:prstGeom>
+          <a:ln>
+            <a:noFill/>
+          </a:ln>
+        </p:spPr>
+        <p:style>
+          <a:lnRef idx="2">
+            <a:schemeClr val="accent1">
+              <a:shade val="15000"/>
+            </a:schemeClr>
+          </a:lnRef>
+          <a:fillRef idx="1">
+            <a:schemeClr val="accent1"/>
+          </a:fillRef>
+          <a:effectRef idx="0">
+            <a:schemeClr val="accent1"/>
+          </a:effectRef>
+          <a:fontRef idx="minor">
+            <a:schemeClr val="lt1"/>
+          </a:fontRef>
+        </p:style>
+        <p:txBody>
+          <a:bodyPr rtlCol="0" anchor="ctr"/>
+          <a:lstStyle/>
+          <a:p>
+            <a:pPr algn="ctr"/>
+            <a:r>
+              <a:rPr lang="de-DE" sz="2000" b="1" dirty="0"/>
+              <a:t>p1MeasureNginx</a:t>
+            </a:r>
+          </a:p>
+        </p:txBody>
+      </p:sp>
+      <p:sp>
+        <p:nvSpPr>
+          <p:cNvPr id="10" name="Rechteck 9">
+            <a:extLst>
+              <a:ext uri="{FF2B5EF4-FFF2-40B4-BE49-F238E27FC236}">
+                <a16:creationId xmlns:a16="http://schemas.microsoft.com/office/drawing/2014/main" id="{29269885-DBF1-3A07-2897-132FCC551F60}"/>
+              </a:ext>
+            </a:extLst>
+          </p:cNvPr>
+          <p:cNvSpPr/>
+          <p:nvPr/>
+        </p:nvSpPr>
+        <p:spPr>
+          <a:xfrm>
+            <a:off x="11324088" y="13106400"/>
+            <a:ext cx="2432505" cy="752475"/>
+          </a:xfrm>
+          <a:prstGeom prst="rect">
+            <a:avLst/>
+          </a:prstGeom>
+        </p:spPr>
+        <p:style>
+          <a:lnRef idx="2">
+            <a:schemeClr val="accent2">
+              <a:shade val="15000"/>
+            </a:schemeClr>
+          </a:lnRef>
+          <a:fillRef idx="1">
+            <a:schemeClr val="accent2"/>
+          </a:fillRef>
+          <a:effectRef idx="0">
+            <a:schemeClr val="accent2"/>
+          </a:effectRef>
+          <a:fontRef idx="minor">
+            <a:schemeClr val="lt1"/>
+          </a:fontRef>
+        </p:style>
+        <p:txBody>
+          <a:bodyPr rtlCol="0" anchor="ctr"/>
+          <a:lstStyle/>
+          <a:p>
+            <a:pPr algn="ctr"/>
+            <a:r>
+              <a:rPr lang="de-DE" sz="2000" b="1" dirty="0" err="1"/>
+              <a:t>OpenDaylight</a:t>
+            </a:r>
+            <a:endParaRPr lang="de-DE" sz="2000" b="1" dirty="0"/>
+          </a:p>
+        </p:txBody>
+      </p:sp>
+      <p:sp>
+        <p:nvSpPr>
+          <p:cNvPr id="11" name="Rechteck 10">
+            <a:extLst>
+              <a:ext uri="{FF2B5EF4-FFF2-40B4-BE49-F238E27FC236}">
+                <a16:creationId xmlns:a16="http://schemas.microsoft.com/office/drawing/2014/main" id="{AAD88752-C26C-1B46-D3B1-FDB3D76F04A4}"/>
+              </a:ext>
+            </a:extLst>
+          </p:cNvPr>
+          <p:cNvSpPr/>
+          <p:nvPr/>
+        </p:nvSpPr>
+        <p:spPr>
+          <a:xfrm>
+            <a:off x="10428739" y="12401550"/>
+            <a:ext cx="547688" cy="2162175"/>
+          </a:xfrm>
+          <a:prstGeom prst="rect">
+            <a:avLst/>
+          </a:prstGeom>
+          <a:ln>
+            <a:noFill/>
+          </a:ln>
+        </p:spPr>
+        <p:style>
+          <a:lnRef idx="2">
+            <a:schemeClr val="accent1">
+              <a:shade val="15000"/>
+            </a:schemeClr>
+          </a:lnRef>
+          <a:fillRef idx="1">
+            <a:schemeClr val="accent1"/>
+          </a:fillRef>
+          <a:effectRef idx="0">
+            <a:schemeClr val="accent1"/>
+          </a:effectRef>
+          <a:fontRef idx="minor">
+            <a:schemeClr val="lt1"/>
+          </a:fontRef>
+        </p:style>
+        <p:txBody>
+          <a:bodyPr rtlCol="0" anchor="ctr"/>
+          <a:lstStyle/>
+          <a:p>
+            <a:pPr algn="ctr"/>
+            <a:endParaRPr lang="de-DE" sz="2000" b="1"/>
+          </a:p>
+        </p:txBody>
+      </p:sp>
+      <p:sp>
+        <p:nvSpPr>
+          <p:cNvPr id="12" name="Rechteck 11">
+            <a:extLst>
+              <a:ext uri="{FF2B5EF4-FFF2-40B4-BE49-F238E27FC236}">
+                <a16:creationId xmlns:a16="http://schemas.microsoft.com/office/drawing/2014/main" id="{E40F0F7B-16FB-4AF1-55DC-EFA445B8D4B7}"/>
+              </a:ext>
+            </a:extLst>
+          </p:cNvPr>
+          <p:cNvSpPr/>
+          <p:nvPr/>
+        </p:nvSpPr>
+        <p:spPr>
+          <a:xfrm>
+            <a:off x="14104254" y="12401550"/>
+            <a:ext cx="547688" cy="2162175"/>
+          </a:xfrm>
+          <a:prstGeom prst="rect">
+            <a:avLst/>
+          </a:prstGeom>
+          <a:ln>
+            <a:noFill/>
+          </a:ln>
+        </p:spPr>
+        <p:style>
+          <a:lnRef idx="2">
+            <a:schemeClr val="accent1">
+              <a:shade val="15000"/>
+            </a:schemeClr>
+          </a:lnRef>
+          <a:fillRef idx="1">
+            <a:schemeClr val="accent1"/>
+          </a:fillRef>
+          <a:effectRef idx="0">
+            <a:schemeClr val="accent1"/>
+          </a:effectRef>
+          <a:fontRef idx="minor">
+            <a:schemeClr val="lt1"/>
+          </a:fontRef>
+        </p:style>
+        <p:txBody>
+          <a:bodyPr rtlCol="0" anchor="ctr"/>
+          <a:lstStyle/>
+          <a:p>
+            <a:pPr algn="ctr"/>
+            <a:endParaRPr lang="de-DE" sz="2000" b="1"/>
+          </a:p>
+        </p:txBody>
+      </p:sp>
+      <p:sp>
+        <p:nvSpPr>
+          <p:cNvPr id="13" name="Rechteck 12">
+            <a:extLst>
+              <a:ext uri="{FF2B5EF4-FFF2-40B4-BE49-F238E27FC236}">
+                <a16:creationId xmlns:a16="http://schemas.microsoft.com/office/drawing/2014/main" id="{3D2C34EF-0172-F1E9-2EFB-5256D91EAEB0}"/>
+              </a:ext>
+            </a:extLst>
+          </p:cNvPr>
+          <p:cNvSpPr/>
+          <p:nvPr/>
+        </p:nvSpPr>
+        <p:spPr>
+          <a:xfrm>
+            <a:off x="10428740" y="12401550"/>
+            <a:ext cx="4223202" cy="376237"/>
+          </a:xfrm>
+          <a:prstGeom prst="rect">
+            <a:avLst/>
+          </a:prstGeom>
+          <a:ln>
+            <a:noFill/>
+          </a:ln>
+        </p:spPr>
+        <p:style>
+          <a:lnRef idx="2">
+            <a:schemeClr val="accent1">
+              <a:shade val="15000"/>
+            </a:schemeClr>
+          </a:lnRef>
+          <a:fillRef idx="1">
+            <a:schemeClr val="accent1"/>
+          </a:fillRef>
+          <a:effectRef idx="0">
+            <a:schemeClr val="accent1"/>
+          </a:effectRef>
+          <a:fontRef idx="minor">
+            <a:schemeClr val="lt1"/>
+          </a:fontRef>
+        </p:style>
+        <p:txBody>
+          <a:bodyPr rtlCol="0" anchor="ctr"/>
+          <a:lstStyle/>
+          <a:p>
+            <a:pPr algn="ctr"/>
+            <a:r>
+              <a:rPr lang="de-DE" sz="2000" b="1" dirty="0"/>
+              <a:t>p1MeasureOdl</a:t>
+            </a:r>
+          </a:p>
+        </p:txBody>
+      </p:sp>
+      <p:sp>
+        <p:nvSpPr>
+          <p:cNvPr id="14" name="Rechteck 13">
+            <a:extLst>
+              <a:ext uri="{FF2B5EF4-FFF2-40B4-BE49-F238E27FC236}">
+                <a16:creationId xmlns:a16="http://schemas.microsoft.com/office/drawing/2014/main" id="{D7BE44B7-2C5E-E4C0-E0AA-7F6C955D8247}"/>
+              </a:ext>
+            </a:extLst>
+          </p:cNvPr>
+          <p:cNvSpPr/>
+          <p:nvPr/>
+        </p:nvSpPr>
+        <p:spPr>
+          <a:xfrm>
+            <a:off x="1287012" y="11379200"/>
+            <a:ext cx="13364930" cy="693737"/>
+          </a:xfrm>
+          <a:prstGeom prst="rect">
+            <a:avLst/>
+          </a:prstGeom>
+          <a:ln/>
+        </p:spPr>
+        <p:style>
+          <a:lnRef idx="2">
+            <a:schemeClr val="accent6">
+              <a:shade val="15000"/>
+            </a:schemeClr>
+          </a:lnRef>
+          <a:fillRef idx="1">
+            <a:schemeClr val="accent6"/>
+          </a:fillRef>
+          <a:effectRef idx="0">
+            <a:schemeClr val="accent6"/>
+          </a:effectRef>
+          <a:fontRef idx="minor">
+            <a:schemeClr val="lt1"/>
+          </a:fontRef>
+        </p:style>
+        <p:txBody>
+          <a:bodyPr rtlCol="0" anchor="ctr"/>
+          <a:lstStyle/>
+          <a:p>
+            <a:pPr algn="ctr"/>
+            <a:r>
+              <a:rPr lang="de-DE" sz="2000" b="1" dirty="0"/>
+              <a:t>p1MeasurementOrchestrator</a:t>
+            </a:r>
+          </a:p>
+        </p:txBody>
+      </p:sp>
+      <p:sp>
+        <p:nvSpPr>
+          <p:cNvPr id="15" name="Rechteck 14">
+            <a:extLst>
+              <a:ext uri="{FF2B5EF4-FFF2-40B4-BE49-F238E27FC236}">
+                <a16:creationId xmlns:a16="http://schemas.microsoft.com/office/drawing/2014/main" id="{F3FF69FC-9F9C-5D33-826B-34F4A1EAF655}"/>
+              </a:ext>
+            </a:extLst>
+          </p:cNvPr>
+          <p:cNvSpPr/>
+          <p:nvPr/>
+        </p:nvSpPr>
+        <p:spPr>
+          <a:xfrm>
+            <a:off x="1287012" y="14187488"/>
+            <a:ext cx="4223202" cy="376237"/>
+          </a:xfrm>
+          <a:prstGeom prst="rect">
+            <a:avLst/>
+          </a:prstGeom>
+          <a:ln>
+            <a:noFill/>
+          </a:ln>
+        </p:spPr>
+        <p:style>
+          <a:lnRef idx="2">
+            <a:schemeClr val="accent1">
+              <a:shade val="15000"/>
+            </a:schemeClr>
+          </a:lnRef>
+          <a:fillRef idx="1">
+            <a:schemeClr val="accent1"/>
+          </a:fillRef>
+          <a:effectRef idx="0">
+            <a:schemeClr val="accent1"/>
+          </a:effectRef>
+          <a:fontRef idx="minor">
+            <a:schemeClr val="lt1"/>
+          </a:fontRef>
+        </p:style>
+        <p:txBody>
+          <a:bodyPr rtlCol="0" anchor="ctr"/>
+          <a:lstStyle/>
+          <a:p>
+            <a:pPr algn="ctr"/>
+            <a:endParaRPr lang="de-DE" sz="2000" b="1" dirty="0"/>
+          </a:p>
+        </p:txBody>
+      </p:sp>
+      <p:sp>
+        <p:nvSpPr>
+          <p:cNvPr id="16" name="Rechteck 15">
+            <a:extLst>
+              <a:ext uri="{FF2B5EF4-FFF2-40B4-BE49-F238E27FC236}">
+                <a16:creationId xmlns:a16="http://schemas.microsoft.com/office/drawing/2014/main" id="{4F40C8AF-C39E-B6D4-349C-4749CF0CB0B2}"/>
+              </a:ext>
+            </a:extLst>
+          </p:cNvPr>
+          <p:cNvSpPr/>
+          <p:nvPr/>
+        </p:nvSpPr>
+        <p:spPr>
+          <a:xfrm>
+            <a:off x="5857876" y="14187488"/>
+            <a:ext cx="4223202" cy="376237"/>
+          </a:xfrm>
+          <a:prstGeom prst="rect">
+            <a:avLst/>
+          </a:prstGeom>
+          <a:ln>
+            <a:noFill/>
+          </a:ln>
+        </p:spPr>
+        <p:style>
+          <a:lnRef idx="2">
+            <a:schemeClr val="accent1">
+              <a:shade val="15000"/>
+            </a:schemeClr>
+          </a:lnRef>
+          <a:fillRef idx="1">
+            <a:schemeClr val="accent1"/>
+          </a:fillRef>
+          <a:effectRef idx="0">
+            <a:schemeClr val="accent1"/>
+          </a:effectRef>
+          <a:fontRef idx="minor">
+            <a:schemeClr val="lt1"/>
+          </a:fontRef>
+        </p:style>
+        <p:txBody>
+          <a:bodyPr rtlCol="0" anchor="ctr"/>
+          <a:lstStyle/>
+          <a:p>
+            <a:pPr algn="ctr"/>
+            <a:endParaRPr lang="de-DE" sz="2000" b="1" dirty="0"/>
+          </a:p>
+        </p:txBody>
+      </p:sp>
+      <p:sp>
+        <p:nvSpPr>
+          <p:cNvPr id="17" name="Rechteck 16">
+            <a:extLst>
+              <a:ext uri="{FF2B5EF4-FFF2-40B4-BE49-F238E27FC236}">
+                <a16:creationId xmlns:a16="http://schemas.microsoft.com/office/drawing/2014/main" id="{0C3BA95A-7016-27CA-0507-D19783EC8F7A}"/>
+              </a:ext>
+            </a:extLst>
+          </p:cNvPr>
+          <p:cNvSpPr/>
+          <p:nvPr/>
+        </p:nvSpPr>
+        <p:spPr>
+          <a:xfrm>
+            <a:off x="10428740" y="14187488"/>
+            <a:ext cx="4223202" cy="376237"/>
+          </a:xfrm>
+          <a:prstGeom prst="rect">
+            <a:avLst/>
+          </a:prstGeom>
+          <a:ln>
+            <a:noFill/>
+          </a:ln>
+        </p:spPr>
+        <p:style>
+          <a:lnRef idx="2">
+            <a:schemeClr val="accent1">
+              <a:shade val="15000"/>
+            </a:schemeClr>
+          </a:lnRef>
+          <a:fillRef idx="1">
+            <a:schemeClr val="accent1"/>
+          </a:fillRef>
+          <a:effectRef idx="0">
+            <a:schemeClr val="accent1"/>
+          </a:effectRef>
+          <a:fontRef idx="minor">
+            <a:schemeClr val="lt1"/>
+          </a:fontRef>
+        </p:style>
+        <p:txBody>
+          <a:bodyPr rtlCol="0" anchor="ctr"/>
+          <a:lstStyle/>
+          <a:p>
+            <a:pPr algn="ctr"/>
+            <a:endParaRPr lang="de-DE" sz="2000" b="1" dirty="0"/>
+          </a:p>
+        </p:txBody>
+      </p:sp>
+      <p:sp>
+        <p:nvSpPr>
+          <p:cNvPr id="20" name="Rechteck 19">
+            <a:extLst>
+              <a:ext uri="{FF2B5EF4-FFF2-40B4-BE49-F238E27FC236}">
+                <a16:creationId xmlns:a16="http://schemas.microsoft.com/office/drawing/2014/main" id="{8679F7DF-3B0B-F18D-9932-2C4F7790704A}"/>
+              </a:ext>
+            </a:extLst>
+          </p:cNvPr>
+          <p:cNvSpPr/>
+          <p:nvPr/>
+        </p:nvSpPr>
+        <p:spPr>
+          <a:xfrm>
+            <a:off x="1287012" y="10356850"/>
+            <a:ext cx="13364930" cy="693737"/>
+          </a:xfrm>
+          <a:prstGeom prst="rect">
+            <a:avLst/>
+          </a:prstGeom>
+          <a:ln/>
+        </p:spPr>
+        <p:style>
+          <a:lnRef idx="2">
+            <a:schemeClr val="accent4">
+              <a:shade val="15000"/>
+            </a:schemeClr>
+          </a:lnRef>
+          <a:fillRef idx="1">
+            <a:schemeClr val="accent4"/>
+          </a:fillRef>
+          <a:effectRef idx="0">
+            <a:schemeClr val="accent4"/>
+          </a:effectRef>
+          <a:fontRef idx="minor">
+            <a:schemeClr val="lt1"/>
+          </a:fontRef>
+        </p:style>
+        <p:txBody>
+          <a:bodyPr rtlCol="0" anchor="ctr"/>
+          <a:lstStyle/>
+          <a:p>
+            <a:pPr algn="ctr"/>
+            <a:r>
+              <a:rPr lang="de-DE" sz="2000" b="1" dirty="0"/>
+              <a:t>p1Pulser</a:t>
+            </a:r>
+          </a:p>
+        </p:txBody>
+      </p:sp>
+      <p:pic>
+        <p:nvPicPr>
+          <p:cNvPr id="19" name="Grafik 18" descr="Wecker mit einfarbiger Füllung">
+            <a:extLst>
+              <a:ext uri="{FF2B5EF4-FFF2-40B4-BE49-F238E27FC236}">
+                <a16:creationId xmlns:a16="http://schemas.microsoft.com/office/drawing/2014/main" id="{B06ECB11-9661-5535-4674-0B24E4EE896A}"/>
+              </a:ext>
+            </a:extLst>
+          </p:cNvPr>
+          <p:cNvPicPr>
+            <a:picLocks noChangeAspect="1"/>
+          </p:cNvPicPr>
+          <p:nvPr/>
+        </p:nvPicPr>
+        <p:blipFill>
+          <a:blip r:embed="rId5">
+            <a:extLst>
+              <a:ext uri="{96DAC541-7B7A-43D3-8B79-37D633B846F1}">
+                <asvg:svgBlip xmlns:asvg="http://schemas.microsoft.com/office/drawing/2016/SVG/main" r:embed="rId6"/>
+              </a:ext>
+            </a:extLst>
+          </a:blip>
+          <a:stretch>
+            <a:fillRect/>
+          </a:stretch>
+        </p:blipFill>
+        <p:spPr>
+          <a:xfrm>
+            <a:off x="6482158" y="10432652"/>
+            <a:ext cx="542131" cy="542131"/>
+          </a:xfrm>
+          <a:prstGeom prst="rect">
+            <a:avLst/>
+          </a:prstGeom>
+        </p:spPr>
+      </p:pic>
+      <p:sp>
+        <p:nvSpPr>
+          <p:cNvPr id="22" name="Flussdiagramm: Magnetplattenspeicher 21">
+            <a:extLst>
+              <a:ext uri="{FF2B5EF4-FFF2-40B4-BE49-F238E27FC236}">
+                <a16:creationId xmlns:a16="http://schemas.microsoft.com/office/drawing/2014/main" id="{42A02D18-4AF0-E404-2777-A983C40EC6B8}"/>
+              </a:ext>
+            </a:extLst>
+          </p:cNvPr>
+          <p:cNvSpPr/>
+          <p:nvPr/>
+        </p:nvSpPr>
+        <p:spPr>
+          <a:xfrm>
+            <a:off x="1287011" y="14884400"/>
+            <a:ext cx="13364931" cy="960437"/>
+          </a:xfrm>
+          <a:prstGeom prst="flowChartMagneticDisk">
+            <a:avLst/>
+          </a:prstGeom>
+        </p:spPr>
+        <p:style>
+          <a:lnRef idx="2">
+            <a:schemeClr val="accent5">
+              <a:shade val="15000"/>
+            </a:schemeClr>
+          </a:lnRef>
+          <a:fillRef idx="1">
+            <a:schemeClr val="accent5"/>
+          </a:fillRef>
+          <a:effectRef idx="0">
+            <a:schemeClr val="accent5"/>
+          </a:effectRef>
+          <a:fontRef idx="minor">
+            <a:schemeClr val="lt1"/>
+          </a:fontRef>
+        </p:style>
+        <p:txBody>
+          <a:bodyPr rtlCol="0" anchor="ctr"/>
+          <a:lstStyle/>
+          <a:p>
+            <a:pPr algn="ctr"/>
+            <a:r>
+              <a:rPr lang="de-DE" sz="2000" b="1" dirty="0" err="1"/>
+              <a:t>OperationalDS</a:t>
+            </a:r>
+            <a:endParaRPr lang="de-DE" sz="2000" b="1" dirty="0"/>
+          </a:p>
+        </p:txBody>
+      </p:sp>
+    </p:spTree>
+    <p:extLst>
+      <p:ext uri="{BB962C8B-B14F-4D97-AF65-F5344CB8AC3E}">
+        <p14:creationId xmlns:p14="http://schemas.microsoft.com/office/powerpoint/2010/main" val="2846893959"/>
+      </p:ext>
+    </p:extLst>
+  </p:cSld>
+  <p:clrMapOvr>
+    <a:masterClrMapping/>
+  </p:clrMapOvr>
+</p:sld>
+</file>
+
 <file path=ppt/tags/tag1.xml><?xml version="1.0" encoding="utf-8"?>
 <p:tagLst xmlns:a="http://schemas.openxmlformats.org/drawingml/2006/main" xmlns:r="http://schemas.openxmlformats.org/officeDocument/2006/relationships" xmlns:p="http://schemas.openxmlformats.org/presentationml/2006/main">
   <p:tag name="THINKCELLSHAPEDONOTDELETE" val="thinkcellActiveDocDoNotDelete"/>
@@ -17195,6 +18278,12 @@
 </file>
 
 <file path=ppt/tags/tag2.xml><?xml version="1.0" encoding="utf-8"?>
+<p:tagLst xmlns:a="http://schemas.openxmlformats.org/drawingml/2006/main" xmlns:r="http://schemas.openxmlformats.org/officeDocument/2006/relationships" xmlns:p="http://schemas.openxmlformats.org/presentationml/2006/main">
+  <p:tag name="THINKCELLSHAPEDONOTDELETE" val="thinkcellActiveDocDoNotDelete"/>
+</p:tagLst>
+</file>
+
+<file path=ppt/tags/tag3.xml><?xml version="1.0" encoding="utf-8"?>
 <p:tagLst xmlns:a="http://schemas.openxmlformats.org/drawingml/2006/main" xmlns:r="http://schemas.openxmlformats.org/officeDocument/2006/relationships" xmlns:p="http://schemas.openxmlformats.org/presentationml/2006/main">
   <p:tag name="THINKCELLSHAPEDONOTDELETE" val="thinkcellActiveDocDoNotDelete"/>
 </p:tagLst>
